--- a/新規_撮影報告書.pptx
+++ b/新規_撮影報告書.pptx
@@ -283,7 +283,7 @@
               <a:pPr>
                 <a:defRPr/>
               </a:pPr>
-              <a:t>2026/4/2</a:t>
+              <a:t>2026/6/19</a:t>
             </a:fld>
             <a:endParaRPr lang="ja-JP" altLang="en-US"/>
           </a:p>
@@ -3011,7 +3011,7 @@
           <a:p>
             <a:r>
               <a:rPr kumimoji="1" lang="ja-JP" altLang="en-US" sz="3800" dirty="0"/>
-              <a:t>撮影報告書</a:t>
+              <a:t>サンプル撮影報告書</a:t>
             </a:r>
           </a:p>
         </p:txBody>
@@ -3046,27 +3046,27 @@
           <a:p>
             <a:r>
               <a:rPr kumimoji="1" lang="en-US" altLang="ja-JP" dirty="0"/>
-              <a:t>2026年　月　日</a:t>
+              <a:t>2026</a:t>
             </a:r>
             <a:r>
               <a:rPr kumimoji="1" lang="ja-JP" altLang="en-US" dirty="0"/>
-              <a:t/>
+              <a:t>年</a:t>
             </a:r>
             <a:r>
               <a:rPr kumimoji="1" lang="en-US" altLang="ja-JP" dirty="0"/>
-              <a:t/>
+              <a:t>4</a:t>
             </a:r>
             <a:r>
               <a:rPr kumimoji="1" lang="ja-JP" altLang="en-US" dirty="0"/>
-              <a:t/>
+              <a:t>月</a:t>
             </a:r>
             <a:r>
               <a:rPr kumimoji="1" lang="en-US" altLang="ja-JP" dirty="0"/>
-              <a:t/>
+              <a:t>2</a:t>
             </a:r>
             <a:r>
               <a:rPr kumimoji="1" lang="ja-JP" altLang="en-US" dirty="0"/>
-              <a:t/>
+              <a:t>日</a:t>
             </a:r>
           </a:p>
         </p:txBody>
@@ -3271,7 +3271,7 @@
           <a:p>
             <a:r>
               <a:rPr lang="ja-JP" altLang="en-US" sz="2400" dirty="0"/>
-              <a:t>【顧客名】様</a:t>
+              <a:t>（株）ニッコー様</a:t>
             </a:r>
           </a:p>
         </p:txBody>
@@ -3348,7 +3348,7 @@
             </a:r>
             <a:r>
               <a:rPr kumimoji="1" lang="en-US" altLang="ja-JP" sz="2400" dirty="0" err="1"/>
-              <a:t>Sample2</a:t>
+              <a:t>SampleB</a:t>
             </a:r>
             <a:r>
               <a:rPr kumimoji="1" lang="ja-JP" altLang="en-US" sz="2400" dirty="0"/>
@@ -3596,7 +3596,7 @@
             </a:r>
             <a:r>
               <a:rPr lang="en-US" altLang="ja-JP" sz="2400" dirty="0" err="1"/>
-              <a:t>2</a:t>
+              <a:t>B</a:t>
             </a:r>
             <a:r>
               <a:rPr kumimoji="1" lang="ja-JP" altLang="en-US" sz="2400" dirty="0"/>
@@ -3844,7 +3844,7 @@
             </a:r>
             <a:r>
               <a:rPr lang="en-US" altLang="ja-JP" sz="2400" dirty="0"/>
-              <a:t>3</a:t>
+              <a:t>C</a:t>
             </a:r>
             <a:r>
               <a:rPr kumimoji="1" lang="ja-JP" altLang="en-US" sz="2400" dirty="0"/>
@@ -4092,7 +4092,7 @@
             </a:r>
             <a:r>
               <a:rPr lang="en-US" altLang="ja-JP" sz="2400" dirty="0"/>
-              <a:t>3</a:t>
+              <a:t>C</a:t>
             </a:r>
             <a:r>
               <a:rPr kumimoji="1" lang="ja-JP" altLang="en-US" sz="2400" dirty="0"/>
@@ -4340,7 +4340,7 @@
             </a:r>
             <a:r>
               <a:rPr lang="en-US" altLang="ja-JP" sz="2400" dirty="0"/>
-              <a:t>3</a:t>
+              <a:t>C</a:t>
             </a:r>
             <a:r>
               <a:rPr kumimoji="1" lang="ja-JP" altLang="en-US" sz="2400" dirty="0"/>
@@ -4676,7 +4676,7 @@
                   <a:srgbClr val="1A66FF"/>
                 </a:solidFill>
               </a:rPr>
-              <a:t>【撮影目的を記載してください】</a:t>
+              <a:t>　撮影目的は、ホーンの</a:t>
             </a:r>
             <a:r>
               <a:rPr lang="en-US" altLang="ja-JP" sz="2000" dirty="0">
@@ -4684,7 +4684,7 @@
                   <a:srgbClr val="1A66FF"/>
                 </a:solidFill>
               </a:rPr>
-              <a:t/>
+              <a:t>SampleA</a:t>
             </a:r>
             <a:r>
               <a:rPr lang="ja-JP" altLang="en-US" sz="2000" dirty="0">
@@ -4692,7 +4692,7 @@
                   <a:srgbClr val="1A66FF"/>
                 </a:solidFill>
               </a:rPr>
-              <a:t/>
+              <a:t>～</a:t>
             </a:r>
             <a:r>
               <a:rPr lang="en-US" altLang="ja-JP" sz="2000" dirty="0">
@@ -4700,7 +4700,7 @@
                   <a:srgbClr val="1A66FF"/>
                 </a:solidFill>
               </a:rPr>
-              <a:t/>
+              <a:t>SampleC</a:t>
             </a:r>
             <a:r>
               <a:rPr lang="ja-JP" altLang="en-US" sz="2000" dirty="0">
@@ -4708,7 +4708,7 @@
                   <a:srgbClr val="1A66FF"/>
                 </a:solidFill>
               </a:rPr>
-              <a:t/>
+              <a:t>をＣＴ撮影を行って、</a:t>
             </a:r>
             <a:endParaRPr lang="en-US" altLang="ja-JP" sz="2000" dirty="0">
               <a:solidFill>
@@ -4723,7 +4723,7 @@
                   <a:srgbClr val="1A66FF"/>
                 </a:solidFill>
               </a:rPr>
-              <a:t/>
+              <a:t>内部コイルと鉄心の位置関係等を計測する。</a:t>
             </a:r>
             <a:endParaRPr lang="en-US" altLang="ja-JP" sz="2000" dirty="0">
               <a:solidFill>
@@ -4906,7 +4906,7 @@
                   <a:srgbClr val="1A66FF"/>
                 </a:solidFill>
               </a:rPr>
-              <a:t>【撮影概要を記載してください】</a:t>
+              <a:t>サンプルの撮影風景を以下に掲載します。</a:t>
             </a:r>
             <a:endParaRPr lang="en-US" altLang="ja-JP" dirty="0">
               <a:solidFill>
@@ -4928,7 +4928,7 @@
                   <a:srgbClr val="1A66FF"/>
                 </a:solidFill>
               </a:rPr>
-              <a:t/>
+              <a:t>・最大管電圧 </a:t>
             </a:r>
             <a:r>
               <a:rPr lang="en-US" altLang="ja-JP" dirty="0">
@@ -4936,7 +4936,7 @@
                   <a:srgbClr val="1A66FF"/>
                 </a:solidFill>
               </a:rPr>
-              <a:t/>
+              <a:t>= 150kV</a:t>
             </a:r>
             <a:r>
               <a:rPr lang="ja-JP" altLang="en-US" dirty="0">
@@ -4944,7 +4944,7 @@
                   <a:srgbClr val="1A66FF"/>
                 </a:solidFill>
               </a:rPr>
-              <a:t/>
+              <a:t>の</a:t>
             </a:r>
             <a:r>
               <a:rPr lang="en-US" altLang="ja-JP" dirty="0">
@@ -4952,7 +4952,7 @@
                   <a:srgbClr val="1A66FF"/>
                 </a:solidFill>
               </a:rPr>
-              <a:t/>
+              <a:t>CT</a:t>
             </a:r>
             <a:r>
               <a:rPr lang="ja-JP" altLang="en-US" dirty="0">
@@ -4960,7 +4960,7 @@
                   <a:srgbClr val="1A66FF"/>
                 </a:solidFill>
               </a:rPr>
-              <a:t/>
+              <a:t>装置を使用して撮影。</a:t>
             </a:r>
             <a:endParaRPr lang="en-US" altLang="ja-JP" dirty="0">
               <a:solidFill>
@@ -4975,7 +4975,7 @@
                   <a:srgbClr val="1A66FF"/>
                 </a:solidFill>
               </a:rPr>
-              <a:t/>
+              <a:t>・銅フィルターを用いてノイズを低減。</a:t>
             </a:r>
             <a:endParaRPr lang="en-US" altLang="ja-JP" dirty="0">
               <a:solidFill>
@@ -4990,7 +4990,7 @@
                   <a:srgbClr val="1A66FF"/>
                 </a:solidFill>
               </a:rPr>
-              <a:t/>
+              <a:t>・積算平均を増やすことで</a:t>
             </a:r>
             <a:r>
               <a:rPr lang="en-US" altLang="ja-JP" dirty="0">
@@ -4998,7 +4998,7 @@
                   <a:srgbClr val="1A66FF"/>
                 </a:solidFill>
               </a:rPr>
-              <a:t/>
+              <a:t>S/N</a:t>
             </a:r>
             <a:r>
               <a:rPr lang="ja-JP" altLang="en-US" dirty="0">
@@ -5006,7 +5006,7 @@
                   <a:srgbClr val="1A66FF"/>
                 </a:solidFill>
               </a:rPr>
-              <a:t/>
+              <a:t>をアップし、ノイズを低減。</a:t>
             </a:r>
             <a:endParaRPr lang="en-US" altLang="ja-JP" dirty="0">
               <a:solidFill>
@@ -5584,7 +5584,7 @@
                   <a:srgbClr val="0070C0"/>
                 </a:solidFill>
               </a:rPr>
-              <a:t>・【結果を記載してください】</a:t>
+              <a:t>　・内部コイルや鉄心などの部品を明確に把握できるよう</a:t>
             </a:r>
             <a:r>
               <a:rPr lang="en-US" altLang="ja-JP" sz="2000" dirty="0">
@@ -5592,7 +5592,7 @@
                   <a:srgbClr val="0070C0"/>
                 </a:solidFill>
               </a:rPr>
-              <a:t/>
+              <a:t>CT</a:t>
             </a:r>
             <a:r>
               <a:rPr lang="ja-JP" altLang="en-US" sz="2000" dirty="0">
@@ -5600,7 +5600,7 @@
                   <a:srgbClr val="0070C0"/>
                 </a:solidFill>
               </a:rPr>
-              <a:t/>
+              <a:t>撮影を実施できました。</a:t>
             </a:r>
             <a:endParaRPr lang="en-US" altLang="ja-JP" sz="2000" dirty="0">
               <a:solidFill>
@@ -5615,7 +5615,7 @@
                   <a:srgbClr val="0070C0"/>
                 </a:solidFill>
               </a:rPr>
-              <a:t/>
+              <a:t>　・鉄心の隙間計測、電磁コイル等の部品配置を確認することは可能である。</a:t>
             </a:r>
             <a:endParaRPr lang="en-US" altLang="ja-JP" sz="2000" dirty="0">
               <a:solidFill>
@@ -5630,7 +5630,7 @@
                   <a:srgbClr val="0070C0"/>
                 </a:solidFill>
               </a:rPr>
-              <a:t/>
+              <a:t>　・</a:t>
             </a:r>
             <a:r>
               <a:rPr lang="en-US" altLang="ja-JP" sz="2000" dirty="0">
@@ -5638,7 +5638,7 @@
                   <a:srgbClr val="0070C0"/>
                 </a:solidFill>
               </a:rPr>
-              <a:t/>
+              <a:t>SampleC</a:t>
             </a:r>
             <a:r>
               <a:rPr lang="ja-JP" altLang="en-US" sz="2000" dirty="0">
@@ -5646,7 +5646,7 @@
                   <a:srgbClr val="0070C0"/>
                 </a:solidFill>
               </a:rPr>
-              <a:t/>
+              <a:t>においては、</a:t>
             </a:r>
             <a:r>
               <a:rPr lang="ja-JP" altLang="en-US" sz="2000" u="sng" dirty="0">
@@ -5654,7 +5654,7 @@
                   <a:srgbClr val="0070C0"/>
                 </a:solidFill>
               </a:rPr>
-              <a:t/>
+              <a:t>電磁コイルが実装</a:t>
             </a:r>
             <a:r>
               <a:rPr lang="ja-JP" altLang="en-US" sz="2000" dirty="0">
@@ -5662,7 +5662,7 @@
                   <a:srgbClr val="0070C0"/>
                 </a:solidFill>
               </a:rPr>
-              <a:t/>
+              <a:t>されていないことを確認しています。</a:t>
             </a:r>
             <a:endParaRPr lang="en-US" altLang="ja-JP" sz="2000" dirty="0">
               <a:solidFill>
@@ -6289,7 +6289,7 @@
             </a:r>
             <a:r>
               <a:rPr kumimoji="1" lang="en-US" altLang="ja-JP" sz="2400" dirty="0"/>
-              <a:t>Sample1</a:t>
+              <a:t>SampleA</a:t>
             </a:r>
             <a:r>
               <a:rPr kumimoji="1" lang="ja-JP" altLang="en-US" sz="2400" dirty="0"/>
@@ -6533,7 +6533,7 @@
             </a:r>
             <a:r>
               <a:rPr kumimoji="1" lang="en-US" altLang="ja-JP" sz="2400" dirty="0"/>
-              <a:t>Sample1</a:t>
+              <a:t>SampleA</a:t>
             </a:r>
             <a:r>
               <a:rPr kumimoji="1" lang="ja-JP" altLang="en-US" sz="2400" dirty="0"/>
